--- a/slides/pptx/week09.pptx
+++ b/slides/pptx/week09.pptx
@@ -506,7 +506,7 @@
           <a:p>
             <a:r>
               <a:rPr lang="en-US" dirty="0"/>
-              <a:t>Proctor deck. BEFORE class: plant per-student flags (seed_flags.py + the flag-planting notes in exams/week09-…-answers.md), bring up the targets, open CTFd. Confirm everyone's VM/Docker works in the first 5 min.</a:t>
+              <a:t>Proctor deck. BEFORE class: graded flags come only from each student's own hosted CTFd instance (see docs/lesson-plans/week09-midterm-practical.md §3.1) — local Docker is practice and serves demo flags. Confirm in the first 5 min that everyone can log in to CTFd and reach a spawned instance.</a:t>
             </a:r>
             <a:endParaRPr lang="en-US" dirty="0"/>
           </a:p>
@@ -594,7 +594,7 @@
           <a:p>
             <a:r>
               <a:rPr lang="en-US" dirty="0"/>
-              <a:t>State the time (150 min) + that flags are per-student (copying is traceable via seed_flags.py verify). Submit via CTFd or the Form. ~2 min.</a:t>
+              <a:t>State the time (150 min) + that graded flags are per-student and come only from your own hosted instance (a flag issued to someone else is traceable through CTFd's own records and ctf_integrity_report.py). A local FLAG{..._demo} flag is not a valid submission. Submit via CTFd or the Form. ~2 min.</a:t>
             </a:r>
             <a:endParaRPr lang="en-US" dirty="0"/>
           </a:p>
@@ -858,7 +858,7 @@
           <a:p>
             <a:r>
               <a:rPr lang="en-US" dirty="0"/>
-              <a:t>Close: collect submissions; grade with the answer key + seed_flags.py verify for copied flags. Preview W10 (APIs).</a:t>
+              <a:t>Close: collect submissions; grade with the answer key + ctf_integrity_report.py for copied flags (hosted-instance flags only — a _demo flag proves nothing). Preview W10 (APIs).</a:t>
             </a:r>
             <a:endParaRPr lang="en-US" dirty="0"/>
           </a:p>
